--- a/tema3-glomerulonefritis/tema3_glomerulonefritis_cronica.pptx
+++ b/tema3-glomerulonefritis/tema3_glomerulonefritis_cronica.pptx
@@ -5432,7 +5432,7 @@
                 </a:solidFill>
                 <a:latin typeface="Montserrat"/>
               </a:rPr>
-              <a:t>Diagnosticada hace 5 años con apego terapéutico irregular; acelera el daño hemodinámico.</a:t>
+              <a:t>Pauta irregular desde hace 5 años; la sobrecarga presora aceleró el colapso hemodinámico de las nefronas.</a:t>
             </a:r>
           </a:p>
         </p:txBody>
@@ -6032,226 +6032,8 @@
         </p:nvSpPr>
         <p:spPr>
           <a:xfrm>
-            <a:off x="594360" y="1417320"/>
-            <a:ext cx="4023360" cy="4526280"/>
-          </a:xfrm>
-          <a:prstGeom prst="roundRect">
-            <a:avLst>
-              <a:gd name="adj" fmla="val 4000"/>
-            </a:avLst>
-          </a:prstGeom>
-          <a:solidFill>
-            <a:srgbClr val="3854CC"/>
-          </a:solidFill>
-          <a:ln>
-            <a:noFill/>
-          </a:ln>
-          <a:effectLst/>
-        </p:spPr>
-        <p:style>
-          <a:lnRef idx="1">
-            <a:schemeClr val="accent1"/>
-          </a:lnRef>
-          <a:fillRef idx="3">
-            <a:schemeClr val="accent1"/>
-          </a:fillRef>
-          <a:effectRef idx="2">
-            <a:schemeClr val="accent1"/>
-          </a:effectRef>
-          <a:fontRef idx="minor">
-            <a:schemeClr val="lt1"/>
-          </a:fontRef>
-        </p:style>
-        <p:txBody>
-          <a:bodyPr rtlCol="0" anchor="ctr"/>
-          <a:lstStyle/>
-          <a:p>
-            <a:pPr algn="ctr"/>
-          </a:p>
-        </p:txBody>
-      </p:sp>
-      <p:sp>
-        <p:nvSpPr>
-          <p:cNvPr id="9" name="Rectangle 8"/>
-          <p:cNvSpPr/>
-          <p:nvPr/>
-        </p:nvSpPr>
-        <p:spPr>
-          <a:xfrm>
-            <a:off x="594360" y="1417320"/>
-            <a:ext cx="4023360" cy="54864"/>
-          </a:xfrm>
-          <a:prstGeom prst="rect">
-            <a:avLst/>
-          </a:prstGeom>
-          <a:solidFill>
-            <a:srgbClr val="D92A2B"/>
-          </a:solidFill>
-          <a:ln>
-            <a:noFill/>
-          </a:ln>
-          <a:effectLst/>
-        </p:spPr>
-        <p:style>
-          <a:lnRef idx="1">
-            <a:schemeClr val="accent1"/>
-          </a:lnRef>
-          <a:fillRef idx="3">
-            <a:schemeClr val="accent1"/>
-          </a:fillRef>
-          <a:effectRef idx="2">
-            <a:schemeClr val="accent1"/>
-          </a:effectRef>
-          <a:fontRef idx="minor">
-            <a:schemeClr val="lt1"/>
-          </a:fontRef>
-        </p:style>
-        <p:txBody>
-          <a:bodyPr rtlCol="0" anchor="ctr"/>
-          <a:lstStyle/>
-          <a:p>
-            <a:pPr algn="ctr"/>
-          </a:p>
-        </p:txBody>
-      </p:sp>
-      <p:sp>
-        <p:nvSpPr>
-          <p:cNvPr id="10" name="TextBox 9"/>
-          <p:cNvSpPr txBox="1"/>
-          <p:nvPr/>
-        </p:nvSpPr>
-        <p:spPr>
-          <a:xfrm>
-            <a:off x="777240" y="2011680"/>
-            <a:ext cx="3657600" cy="1463040"/>
-          </a:xfrm>
-          <a:prstGeom prst="rect">
-            <a:avLst/>
-          </a:prstGeom>
-          <a:noFill/>
-        </p:spPr>
-        <p:txBody>
-          <a:bodyPr wrap="square" anchor="t" lIns="0" rIns="0" tIns="0" bIns="0">
-            <a:spAutoFit/>
-          </a:bodyPr>
-          <a:lstStyle/>
-          <a:p>
-            <a:pPr algn="ctr">
-              <a:lnSpc>
-                <a:spcPct val="108000"/>
-              </a:lnSpc>
-              <a:spcAft>
-                <a:spcPts val="300"/>
-              </a:spcAft>
-            </a:pPr>
-            <a:r>
-              <a:rPr sz="5200" b="1" i="0">
-                <a:solidFill>
-                  <a:srgbClr val="FFFFFF"/>
-                </a:solidFill>
-                <a:latin typeface="Montserrat"/>
-              </a:rPr>
-              <a:t>11</a:t>
-            </a:r>
-          </a:p>
-        </p:txBody>
-      </p:sp>
-      <p:sp>
-        <p:nvSpPr>
-          <p:cNvPr id="11" name="Rectangle 10"/>
-          <p:cNvSpPr/>
-          <p:nvPr/>
-        </p:nvSpPr>
-        <p:spPr>
-          <a:xfrm>
-            <a:off x="2057400" y="3657600"/>
-            <a:ext cx="1097280" cy="22860"/>
-          </a:xfrm>
-          <a:prstGeom prst="rect">
-            <a:avLst/>
-          </a:prstGeom>
-          <a:solidFill>
-            <a:srgbClr val="D92A2B"/>
-          </a:solidFill>
-          <a:ln>
-            <a:noFill/>
-          </a:ln>
-          <a:effectLst/>
-        </p:spPr>
-        <p:style>
-          <a:lnRef idx="1">
-            <a:schemeClr val="accent1"/>
-          </a:lnRef>
-          <a:fillRef idx="3">
-            <a:schemeClr val="accent1"/>
-          </a:fillRef>
-          <a:effectRef idx="2">
-            <a:schemeClr val="accent1"/>
-          </a:effectRef>
-          <a:fontRef idx="minor">
-            <a:schemeClr val="lt1"/>
-          </a:fontRef>
-        </p:style>
-        <p:txBody>
-          <a:bodyPr rtlCol="0" anchor="ctr"/>
-          <a:lstStyle/>
-          <a:p>
-            <a:pPr algn="ctr"/>
-          </a:p>
-        </p:txBody>
-      </p:sp>
-      <p:sp>
-        <p:nvSpPr>
-          <p:cNvPr id="12" name="TextBox 11"/>
-          <p:cNvSpPr txBox="1"/>
-          <p:nvPr/>
-        </p:nvSpPr>
-        <p:spPr>
-          <a:xfrm>
-            <a:off x="822960" y="3886200"/>
-            <a:ext cx="3566160" cy="1645920"/>
-          </a:xfrm>
-          <a:prstGeom prst="rect">
-            <a:avLst/>
-          </a:prstGeom>
-          <a:noFill/>
-        </p:spPr>
-        <p:txBody>
-          <a:bodyPr wrap="square" anchor="t" lIns="0" rIns="0" tIns="0" bIns="0">
-            <a:spAutoFit/>
-          </a:bodyPr>
-          <a:lstStyle/>
-          <a:p>
-            <a:pPr algn="ctr">
-              <a:lnSpc>
-                <a:spcPct val="115000"/>
-              </a:lnSpc>
-              <a:spcAft>
-                <a:spcPts val="300"/>
-              </a:spcAft>
-            </a:pPr>
-            <a:r>
-              <a:rPr sz="1350" b="0" i="0">
-                <a:solidFill>
-                  <a:srgbClr val="FFFFFF"/>
-                </a:solidFill>
-                <a:latin typeface="Montserrat"/>
-              </a:rPr>
-              <a:t>mL/min/1,73 m² de TFGe — ERC estadio 5 (terminal)</a:t>
-            </a:r>
-          </a:p>
-        </p:txBody>
-      </p:sp>
-      <p:sp>
-        <p:nvSpPr>
-          <p:cNvPr id="13" name="Rounded Rectangle 12"/>
-          <p:cNvSpPr/>
-          <p:nvPr/>
-        </p:nvSpPr>
-        <p:spPr>
-          <a:xfrm>
-            <a:off x="3886200" y="1417320"/>
-            <a:ext cx="3291840" cy="1386840"/>
+            <a:off x="594360" y="1632204"/>
+            <a:ext cx="6858000" cy="914400"/>
           </a:xfrm>
           <a:prstGeom prst="roundRect">
             <a:avLst>
@@ -6292,23 +6074,27 @@
       </p:sp>
       <p:sp>
         <p:nvSpPr>
-          <p:cNvPr id="14" name="Rectangle 13"/>
+          <p:cNvPr id="9" name="Rounded Rectangle 8"/>
           <p:cNvSpPr/>
           <p:nvPr/>
         </p:nvSpPr>
         <p:spPr>
           <a:xfrm>
-            <a:off x="3886200" y="1417320"/>
-            <a:ext cx="54864" cy="1386840"/>
-          </a:xfrm>
-          <a:prstGeom prst="rect">
-            <a:avLst/>
+            <a:off x="777240" y="1924812"/>
+            <a:ext cx="329184" cy="329184"/>
+          </a:xfrm>
+          <a:prstGeom prst="roundRect">
+            <a:avLst>
+              <a:gd name="adj" fmla="val 8000"/>
+            </a:avLst>
           </a:prstGeom>
           <a:solidFill>
-            <a:srgbClr val="D92A2B"/>
+            <a:srgbClr val="EEF0FF"/>
           </a:solidFill>
-          <a:ln>
-            <a:noFill/>
+          <a:ln w="15240">
+            <a:solidFill>
+              <a:srgbClr val="186E48"/>
+            </a:solidFill>
           </a:ln>
           <a:effectLst/>
         </p:spPr>
@@ -6336,14 +6122,56 @@
       </p:sp>
       <p:sp>
         <p:nvSpPr>
-          <p:cNvPr id="15" name="TextBox 14"/>
+          <p:cNvPr id="10" name="TextBox 9"/>
           <p:cNvSpPr txBox="1"/>
           <p:nvPr/>
         </p:nvSpPr>
         <p:spPr>
           <a:xfrm>
-            <a:off x="4114800" y="1527048"/>
-            <a:ext cx="2880360" cy="1167384"/>
+            <a:off x="777240" y="1906524"/>
+            <a:ext cx="329184" cy="329184"/>
+          </a:xfrm>
+          <a:prstGeom prst="rect">
+            <a:avLst/>
+          </a:prstGeom>
+          <a:noFill/>
+        </p:spPr>
+        <p:txBody>
+          <a:bodyPr wrap="square" anchor="t" lIns="0" rIns="0" tIns="0" bIns="0">
+            <a:spAutoFit/>
+          </a:bodyPr>
+          <a:lstStyle/>
+          <a:p>
+            <a:pPr algn="ctr">
+              <a:lnSpc>
+                <a:spcPct val="108000"/>
+              </a:lnSpc>
+              <a:spcAft>
+                <a:spcPts val="300"/>
+              </a:spcAft>
+            </a:pPr>
+            <a:r>
+              <a:rPr sz="1400" b="1" i="0">
+                <a:solidFill>
+                  <a:srgbClr val="186E48"/>
+                </a:solidFill>
+                <a:latin typeface="Montserrat"/>
+              </a:rPr>
+              <a:t>✓</a:t>
+            </a:r>
+          </a:p>
+        </p:txBody>
+      </p:sp>
+      <p:sp>
+        <p:nvSpPr>
+          <p:cNvPr id="11" name="TextBox 10"/>
+          <p:cNvSpPr txBox="1"/>
+          <p:nvPr/>
+        </p:nvSpPr>
+        <p:spPr>
+          <a:xfrm>
+            <a:off x="1280160" y="1705356"/>
+            <a:ext cx="6080760" cy="768096"/>
           </a:xfrm>
           <a:prstGeom prst="rect">
             <a:avLst/>
@@ -6364,7 +6192,7 @@
                 <a:spcPts val="0"/>
               </a:spcBef>
               <a:spcAft>
-                <a:spcPts val="300"/>
+                <a:spcPts val="200"/>
               </a:spcAft>
             </a:pPr>
             <a:r>
@@ -6374,13 +6202,13 @@
                 </a:solidFill>
                 <a:latin typeface="Montserrat"/>
               </a:rPr>
-              <a:t>Bioquímica</a:t>
+              <a:t>TFGe 11 mL/min/1,73 m²</a:t>
             </a:r>
           </a:p>
           <a:p>
             <a:pPr algn="l">
               <a:lnSpc>
-                <a:spcPct val="110000"/>
+                <a:spcPct val="105000"/>
               </a:lnSpc>
               <a:spcBef>
                 <a:spcPts val="0"/>
@@ -6390,27 +6218,27 @@
               </a:spcAft>
             </a:pPr>
             <a:r>
-              <a:rPr sz="1100" b="0" i="0">
+              <a:rPr sz="1080" b="0" i="0">
                 <a:solidFill>
                   <a:srgbClr val="2B2C4A"/>
                 </a:solidFill>
                 <a:latin typeface="Montserrat"/>
               </a:rPr>
-              <a:t>Urea 142 mg/dL y creatinina 5,8 mg/dL; calcio 7,8 mg/dL y fósforo 6,4 mg/dL.</a:t>
-            </a:r>
-          </a:p>
-        </p:txBody>
-      </p:sp>
-      <p:sp>
-        <p:nvSpPr>
-          <p:cNvPr id="16" name="Rounded Rectangle 15"/>
+              <a:t>ERC estadio 5 (terminal): urea 142 mg/dL y creatinina 5,8 mg/dL.</a:t>
+            </a:r>
+          </a:p>
+        </p:txBody>
+      </p:sp>
+      <p:sp>
+        <p:nvSpPr>
+          <p:cNvPr id="12" name="Rounded Rectangle 11"/>
           <p:cNvSpPr/>
           <p:nvPr/>
         </p:nvSpPr>
         <p:spPr>
           <a:xfrm>
-            <a:off x="3886200" y="2987040"/>
-            <a:ext cx="3291840" cy="1386840"/>
+            <a:off x="594360" y="2692908"/>
+            <a:ext cx="6858000" cy="914400"/>
           </a:xfrm>
           <a:prstGeom prst="roundRect">
             <a:avLst>
@@ -6451,23 +6279,27 @@
       </p:sp>
       <p:sp>
         <p:nvSpPr>
-          <p:cNvPr id="17" name="Rectangle 16"/>
+          <p:cNvPr id="13" name="Rounded Rectangle 12"/>
           <p:cNvSpPr/>
           <p:nvPr/>
         </p:nvSpPr>
         <p:spPr>
           <a:xfrm>
-            <a:off x="3886200" y="2987040"/>
-            <a:ext cx="54864" cy="1386840"/>
-          </a:xfrm>
-          <a:prstGeom prst="rect">
-            <a:avLst/>
+            <a:off x="777240" y="2985515"/>
+            <a:ext cx="329184" cy="329184"/>
+          </a:xfrm>
+          <a:prstGeom prst="roundRect">
+            <a:avLst>
+              <a:gd name="adj" fmla="val 8000"/>
+            </a:avLst>
           </a:prstGeom>
           <a:solidFill>
-            <a:srgbClr val="D92A2B"/>
+            <a:srgbClr val="EEF0FF"/>
           </a:solidFill>
-          <a:ln>
-            <a:noFill/>
+          <a:ln w="15240">
+            <a:solidFill>
+              <a:srgbClr val="186E48"/>
+            </a:solidFill>
           </a:ln>
           <a:effectLst/>
         </p:spPr>
@@ -6495,14 +6327,56 @@
       </p:sp>
       <p:sp>
         <p:nvSpPr>
-          <p:cNvPr id="18" name="TextBox 17"/>
+          <p:cNvPr id="14" name="TextBox 13"/>
           <p:cNvSpPr txBox="1"/>
           <p:nvPr/>
         </p:nvSpPr>
         <p:spPr>
           <a:xfrm>
-            <a:off x="4114800" y="3096768"/>
-            <a:ext cx="2880360" cy="1167384"/>
+            <a:off x="777240" y="2967227"/>
+            <a:ext cx="329184" cy="329184"/>
+          </a:xfrm>
+          <a:prstGeom prst="rect">
+            <a:avLst/>
+          </a:prstGeom>
+          <a:noFill/>
+        </p:spPr>
+        <p:txBody>
+          <a:bodyPr wrap="square" anchor="t" lIns="0" rIns="0" tIns="0" bIns="0">
+            <a:spAutoFit/>
+          </a:bodyPr>
+          <a:lstStyle/>
+          <a:p>
+            <a:pPr algn="ctr">
+              <a:lnSpc>
+                <a:spcPct val="108000"/>
+              </a:lnSpc>
+              <a:spcAft>
+                <a:spcPts val="300"/>
+              </a:spcAft>
+            </a:pPr>
+            <a:r>
+              <a:rPr sz="1400" b="1" i="0">
+                <a:solidFill>
+                  <a:srgbClr val="186E48"/>
+                </a:solidFill>
+                <a:latin typeface="Montserrat"/>
+              </a:rPr>
+              <a:t>✓</a:t>
+            </a:r>
+          </a:p>
+        </p:txBody>
+      </p:sp>
+      <p:sp>
+        <p:nvSpPr>
+          <p:cNvPr id="15" name="TextBox 14"/>
+          <p:cNvSpPr txBox="1"/>
+          <p:nvPr/>
+        </p:nvSpPr>
+        <p:spPr>
+          <a:xfrm>
+            <a:off x="1280160" y="2766060"/>
+            <a:ext cx="6080760" cy="768096"/>
           </a:xfrm>
           <a:prstGeom prst="rect">
             <a:avLst/>
@@ -6523,7 +6397,7 @@
                 <a:spcPts val="0"/>
               </a:spcBef>
               <a:spcAft>
-                <a:spcPts val="300"/>
+                <a:spcPts val="200"/>
               </a:spcAft>
             </a:pPr>
             <a:r>
@@ -6533,13 +6407,13 @@
                 </a:solidFill>
                 <a:latin typeface="Montserrat"/>
               </a:rPr>
-              <a:t>Hemograma y orina</a:t>
+              <a:t>Anemia normocítica</a:t>
             </a:r>
           </a:p>
           <a:p>
             <a:pPr algn="l">
               <a:lnSpc>
-                <a:spcPct val="110000"/>
+                <a:spcPct val="105000"/>
               </a:lnSpc>
               <a:spcBef>
                 <a:spcPts val="0"/>
@@ -6549,27 +6423,27 @@
               </a:spcAft>
             </a:pPr>
             <a:r>
-              <a:rPr sz="1100" b="0" i="0">
+              <a:rPr sz="1080" b="0" i="0">
                 <a:solidFill>
                   <a:srgbClr val="2B2C4A"/>
                 </a:solidFill>
                 <a:latin typeface="Montserrat"/>
               </a:rPr>
-              <a:t>Hemoglobina 8,9 g/dL (anemia normocítica normocrómica); proteinuria 1,8 g/24 h con cilindros céreos anchos.</a:t>
-            </a:r>
-          </a:p>
-        </p:txBody>
-      </p:sp>
-      <p:sp>
-        <p:nvSpPr>
-          <p:cNvPr id="19" name="Rounded Rectangle 18"/>
+              <a:t>Hemoglobina 8,9 g/dL por déficit de eritropoyetina; calcio 7,8 y fósforo 6,4 mg/dL.</a:t>
+            </a:r>
+          </a:p>
+        </p:txBody>
+      </p:sp>
+      <p:sp>
+        <p:nvSpPr>
+          <p:cNvPr id="16" name="Rounded Rectangle 15"/>
           <p:cNvSpPr/>
           <p:nvPr/>
         </p:nvSpPr>
         <p:spPr>
           <a:xfrm>
-            <a:off x="3886200" y="4556760"/>
-            <a:ext cx="3291840" cy="1386840"/>
+            <a:off x="594360" y="3753611"/>
+            <a:ext cx="6858000" cy="914400"/>
           </a:xfrm>
           <a:prstGeom prst="roundRect">
             <a:avLst>
@@ -6610,23 +6484,27 @@
       </p:sp>
       <p:sp>
         <p:nvSpPr>
-          <p:cNvPr id="20" name="Rectangle 19"/>
+          <p:cNvPr id="17" name="Rounded Rectangle 16"/>
           <p:cNvSpPr/>
           <p:nvPr/>
         </p:nvSpPr>
         <p:spPr>
           <a:xfrm>
-            <a:off x="3886200" y="4556760"/>
-            <a:ext cx="54864" cy="1386840"/>
-          </a:xfrm>
-          <a:prstGeom prst="rect">
-            <a:avLst/>
+            <a:off x="777240" y="4046220"/>
+            <a:ext cx="329184" cy="329184"/>
+          </a:xfrm>
+          <a:prstGeom prst="roundRect">
+            <a:avLst>
+              <a:gd name="adj" fmla="val 8000"/>
+            </a:avLst>
           </a:prstGeom>
           <a:solidFill>
-            <a:srgbClr val="D92A2B"/>
+            <a:srgbClr val="EEF0FF"/>
           </a:solidFill>
-          <a:ln>
-            <a:noFill/>
+          <a:ln w="15240">
+            <a:solidFill>
+              <a:srgbClr val="186E48"/>
+            </a:solidFill>
           </a:ln>
           <a:effectLst/>
         </p:spPr>
@@ -6654,14 +6532,56 @@
       </p:sp>
       <p:sp>
         <p:nvSpPr>
-          <p:cNvPr id="21" name="TextBox 20"/>
+          <p:cNvPr id="18" name="TextBox 17"/>
           <p:cNvSpPr txBox="1"/>
           <p:nvPr/>
         </p:nvSpPr>
         <p:spPr>
           <a:xfrm>
-            <a:off x="4114800" y="4666488"/>
-            <a:ext cx="2880360" cy="1167384"/>
+            <a:off x="777240" y="4027931"/>
+            <a:ext cx="329184" cy="329184"/>
+          </a:xfrm>
+          <a:prstGeom prst="rect">
+            <a:avLst/>
+          </a:prstGeom>
+          <a:noFill/>
+        </p:spPr>
+        <p:txBody>
+          <a:bodyPr wrap="square" anchor="t" lIns="0" rIns="0" tIns="0" bIns="0">
+            <a:spAutoFit/>
+          </a:bodyPr>
+          <a:lstStyle/>
+          <a:p>
+            <a:pPr algn="ctr">
+              <a:lnSpc>
+                <a:spcPct val="108000"/>
+              </a:lnSpc>
+              <a:spcAft>
+                <a:spcPts val="300"/>
+              </a:spcAft>
+            </a:pPr>
+            <a:r>
+              <a:rPr sz="1400" b="1" i="0">
+                <a:solidFill>
+                  <a:srgbClr val="186E48"/>
+                </a:solidFill>
+                <a:latin typeface="Montserrat"/>
+              </a:rPr>
+              <a:t>✓</a:t>
+            </a:r>
+          </a:p>
+        </p:txBody>
+      </p:sp>
+      <p:sp>
+        <p:nvSpPr>
+          <p:cNvPr id="19" name="TextBox 18"/>
+          <p:cNvSpPr txBox="1"/>
+          <p:nvPr/>
+        </p:nvSpPr>
+        <p:spPr>
+          <a:xfrm>
+            <a:off x="1280160" y="3826763"/>
+            <a:ext cx="6080760" cy="768096"/>
           </a:xfrm>
           <a:prstGeom prst="rect">
             <a:avLst/>
@@ -6682,7 +6602,7 @@
                 <a:spcPts val="0"/>
               </a:spcBef>
               <a:spcAft>
-                <a:spcPts val="300"/>
+                <a:spcPts val="200"/>
               </a:spcAft>
             </a:pPr>
             <a:r>
@@ -6692,13 +6612,13 @@
                 </a:solidFill>
                 <a:latin typeface="Montserrat"/>
               </a:rPr>
-              <a:t>Ecografía bilateral</a:t>
+              <a:t>Sedimento de orina</a:t>
             </a:r>
           </a:p>
           <a:p>
             <a:pPr algn="l">
               <a:lnSpc>
-                <a:spcPct val="110000"/>
+                <a:spcPct val="105000"/>
               </a:lnSpc>
               <a:spcBef>
                 <a:spcPts val="0"/>
@@ -6708,27 +6628,232 @@
               </a:spcAft>
             </a:pPr>
             <a:r>
-              <a:rPr sz="1100" b="0" i="0">
+              <a:rPr sz="1080" b="0" i="0">
                 <a:solidFill>
                   <a:srgbClr val="2B2C4A"/>
                 </a:solidFill>
                 <a:latin typeface="Montserrat"/>
               </a:rPr>
-              <a:t>Riñones simétricos de 7,5-7,8 cm, hiperecogénicos, con corteza &lt; 3 mm y pérdida corticomedular.</a:t>
-            </a:r>
-          </a:p>
-        </p:txBody>
-      </p:sp>
-      <p:sp>
-        <p:nvSpPr>
-          <p:cNvPr id="22" name="Rounded Rectangle 21"/>
+              <a:t>Proteinuria 1,8 g/24 h con cilindros céreos anchos y hematíes dismórficos.</a:t>
+            </a:r>
+          </a:p>
+        </p:txBody>
+      </p:sp>
+      <p:sp>
+        <p:nvSpPr>
+          <p:cNvPr id="20" name="Rounded Rectangle 19"/>
           <p:cNvSpPr/>
           <p:nvPr/>
         </p:nvSpPr>
         <p:spPr>
           <a:xfrm>
-            <a:off x="7324344" y="2496727"/>
-            <a:ext cx="4279392" cy="2367464"/>
+            <a:off x="594360" y="4814316"/>
+            <a:ext cx="6858000" cy="914400"/>
+          </a:xfrm>
+          <a:prstGeom prst="roundRect">
+            <a:avLst>
+              <a:gd name="adj" fmla="val 4000"/>
+            </a:avLst>
+          </a:prstGeom>
+          <a:solidFill>
+            <a:srgbClr val="FFFFFF"/>
+          </a:solidFill>
+          <a:ln w="7620">
+            <a:solidFill>
+              <a:srgbClr val="D9DDF2"/>
+            </a:solidFill>
+          </a:ln>
+          <a:effectLst/>
+        </p:spPr>
+        <p:style>
+          <a:lnRef idx="1">
+            <a:schemeClr val="accent1"/>
+          </a:lnRef>
+          <a:fillRef idx="3">
+            <a:schemeClr val="accent1"/>
+          </a:fillRef>
+          <a:effectRef idx="2">
+            <a:schemeClr val="accent1"/>
+          </a:effectRef>
+          <a:fontRef idx="minor">
+            <a:schemeClr val="lt1"/>
+          </a:fontRef>
+        </p:style>
+        <p:txBody>
+          <a:bodyPr rtlCol="0" anchor="ctr"/>
+          <a:lstStyle/>
+          <a:p>
+            <a:pPr algn="ctr"/>
+          </a:p>
+        </p:txBody>
+      </p:sp>
+      <p:sp>
+        <p:nvSpPr>
+          <p:cNvPr id="21" name="Rounded Rectangle 20"/>
+          <p:cNvSpPr/>
+          <p:nvPr/>
+        </p:nvSpPr>
+        <p:spPr>
+          <a:xfrm>
+            <a:off x="777240" y="5106924"/>
+            <a:ext cx="329184" cy="329184"/>
+          </a:xfrm>
+          <a:prstGeom prst="roundRect">
+            <a:avLst>
+              <a:gd name="adj" fmla="val 8000"/>
+            </a:avLst>
+          </a:prstGeom>
+          <a:solidFill>
+            <a:srgbClr val="EEF0FF"/>
+          </a:solidFill>
+          <a:ln w="15240">
+            <a:solidFill>
+              <a:srgbClr val="186E48"/>
+            </a:solidFill>
+          </a:ln>
+          <a:effectLst/>
+        </p:spPr>
+        <p:style>
+          <a:lnRef idx="1">
+            <a:schemeClr val="accent1"/>
+          </a:lnRef>
+          <a:fillRef idx="3">
+            <a:schemeClr val="accent1"/>
+          </a:fillRef>
+          <a:effectRef idx="2">
+            <a:schemeClr val="accent1"/>
+          </a:effectRef>
+          <a:fontRef idx="minor">
+            <a:schemeClr val="lt1"/>
+          </a:fontRef>
+        </p:style>
+        <p:txBody>
+          <a:bodyPr rtlCol="0" anchor="ctr"/>
+          <a:lstStyle/>
+          <a:p>
+            <a:pPr algn="ctr"/>
+          </a:p>
+        </p:txBody>
+      </p:sp>
+      <p:sp>
+        <p:nvSpPr>
+          <p:cNvPr id="22" name="TextBox 21"/>
+          <p:cNvSpPr txBox="1"/>
+          <p:nvPr/>
+        </p:nvSpPr>
+        <p:spPr>
+          <a:xfrm>
+            <a:off x="777240" y="5088636"/>
+            <a:ext cx="329184" cy="329184"/>
+          </a:xfrm>
+          <a:prstGeom prst="rect">
+            <a:avLst/>
+          </a:prstGeom>
+          <a:noFill/>
+        </p:spPr>
+        <p:txBody>
+          <a:bodyPr wrap="square" anchor="t" lIns="0" rIns="0" tIns="0" bIns="0">
+            <a:spAutoFit/>
+          </a:bodyPr>
+          <a:lstStyle/>
+          <a:p>
+            <a:pPr algn="ctr">
+              <a:lnSpc>
+                <a:spcPct val="108000"/>
+              </a:lnSpc>
+              <a:spcAft>
+                <a:spcPts val="300"/>
+              </a:spcAft>
+            </a:pPr>
+            <a:r>
+              <a:rPr sz="1400" b="1" i="0">
+                <a:solidFill>
+                  <a:srgbClr val="186E48"/>
+                </a:solidFill>
+                <a:latin typeface="Montserrat"/>
+              </a:rPr>
+              <a:t>✓</a:t>
+            </a:r>
+          </a:p>
+        </p:txBody>
+      </p:sp>
+      <p:sp>
+        <p:nvSpPr>
+          <p:cNvPr id="23" name="TextBox 22"/>
+          <p:cNvSpPr txBox="1"/>
+          <p:nvPr/>
+        </p:nvSpPr>
+        <p:spPr>
+          <a:xfrm>
+            <a:off x="1280160" y="4887468"/>
+            <a:ext cx="6080760" cy="768096"/>
+          </a:xfrm>
+          <a:prstGeom prst="rect">
+            <a:avLst/>
+          </a:prstGeom>
+          <a:noFill/>
+        </p:spPr>
+        <p:txBody>
+          <a:bodyPr wrap="square" anchor="ctr" lIns="0" rIns="0" tIns="0" bIns="0">
+            <a:spAutoFit/>
+          </a:bodyPr>
+          <a:lstStyle/>
+          <a:p>
+            <a:pPr algn="l">
+              <a:lnSpc>
+                <a:spcPct val="108000"/>
+              </a:lnSpc>
+              <a:spcBef>
+                <a:spcPts val="0"/>
+              </a:spcBef>
+              <a:spcAft>
+                <a:spcPts val="200"/>
+              </a:spcAft>
+            </a:pPr>
+            <a:r>
+              <a:rPr sz="1250" b="1" i="0">
+                <a:solidFill>
+                  <a:srgbClr val="3854CC"/>
+                </a:solidFill>
+                <a:latin typeface="Montserrat"/>
+              </a:rPr>
+              <a:t>Ecografía bilateral</a:t>
+            </a:r>
+          </a:p>
+          <a:p>
+            <a:pPr algn="l">
+              <a:lnSpc>
+                <a:spcPct val="105000"/>
+              </a:lnSpc>
+              <a:spcBef>
+                <a:spcPts val="0"/>
+              </a:spcBef>
+              <a:spcAft>
+                <a:spcPts val="300"/>
+              </a:spcAft>
+            </a:pPr>
+            <a:r>
+              <a:rPr sz="1080" b="0" i="0">
+                <a:solidFill>
+                  <a:srgbClr val="2B2C4A"/>
+                </a:solidFill>
+                <a:latin typeface="Montserrat"/>
+              </a:rPr>
+              <a:t>Riñones simétricos de 7,5-7,8 cm, hiperecogénicos, con corteza &lt; 3 mm.</a:t>
+            </a:r>
+          </a:p>
+        </p:txBody>
+      </p:sp>
+      <p:sp>
+        <p:nvSpPr>
+          <p:cNvPr id="24" name="Rounded Rectangle 23"/>
+          <p:cNvSpPr/>
+          <p:nvPr/>
+        </p:nvSpPr>
+        <p:spPr>
+          <a:xfrm>
+            <a:off x="7598664" y="2571542"/>
+            <a:ext cx="4005072" cy="2217835"/>
           </a:xfrm>
           <a:prstGeom prst="roundRect">
             <a:avLst>
@@ -6769,7 +6894,7 @@
       </p:sp>
       <p:pic>
         <p:nvPicPr>
-          <p:cNvPr id="23" name="Picture 22" descr="eco_rinon_contraido.png"/>
+          <p:cNvPr id="25" name="Picture 24" descr="eco_rinon_contraido.png"/>
           <p:cNvPicPr>
             <a:picLocks noChangeAspect="1"/>
           </p:cNvPicPr>
@@ -6783,8 +6908,8 @@
         </p:blipFill>
         <p:spPr>
           <a:xfrm>
-            <a:off x="7360920" y="2533303"/>
-            <a:ext cx="4206240" cy="2294312"/>
+            <a:off x="7635240" y="2608118"/>
+            <a:ext cx="3931920" cy="2144683"/>
           </a:xfrm>
           <a:prstGeom prst="rect">
             <a:avLst/>
@@ -6793,7 +6918,7 @@
       </p:pic>
       <p:sp>
         <p:nvSpPr>
-          <p:cNvPr id="24" name="TextBox 23"/>
+          <p:cNvPr id="26" name="TextBox 25"/>
           <p:cNvSpPr txBox="1"/>
           <p:nvPr/>
         </p:nvSpPr>
@@ -7258,7 +7383,7 @@
                 </a:solidFill>
                 <a:latin typeface="Montserrat"/>
               </a:rPr>
-              <a:t>Caso: 7,8 cm y 70 g · Normal: 12 cm y 120-150 g — atrofia simétrica severa.  •  Crédito: Ilustración generada para esta presentación (esquema didáctico)</a:t>
+              <a:t>Caso: 7,8 cm y 70 g frente a valores normales (12 cm y 120-150 g) — reducción simétrica que confirma la lesión crónica terminal.  •  Crédito: Ilustración generada para esta presentación (esquema didáctico)</a:t>
             </a:r>
           </a:p>
         </p:txBody>
@@ -9577,7 +9702,7 @@
                 </a:solidFill>
                 <a:latin typeface="Montserrat"/>
               </a:rPr>
-              <a:t>• Isquemia arteriolar con arterioloesclerosis hialina e hipertensión intraglomerular.</a:t>
+              <a:t>• La arteriolosclerosis hialina estrecha la luz vascular; determina isquemia posglomerular y liberación desregulada de renina.</a:t>
             </a:r>
           </a:p>
           <a:p>
@@ -11702,7 +11827,7 @@
                 </a:solidFill>
                 <a:latin typeface="Montserrat"/>
               </a:rPr>
-              <a:t>ERC estadio G5 (TFGe &lt; 15 mL/min/1,73 m²) · Contraindicado: inmunosupresión, el parénquima esclerótico no es recuperable.</a:t>
+              <a:t>ERC G5 irreversible: &gt; 85% de obsolescencia glomerular contraindica la inmunosupresión e impone terapia de sustitución renal inmediata.</a:t>
             </a:r>
           </a:p>
         </p:txBody>

--- a/tema3-glomerulonefritis/tema3_glomerulonefritis_cronica.pptx
+++ b/tema3-glomerulonefritis/tema3_glomerulonefritis_cronica.pptx
@@ -4588,7 +4588,7 @@
                 </a:solidFill>
                 <a:latin typeface="Montserrat"/>
               </a:rPr>
-              <a:t>ANAMNESIS</a:t>
+              <a:t>CASO CLÍNICO</a:t>
             </a:r>
           </a:p>
         </p:txBody>
@@ -4630,7 +4630,7 @@
                 </a:solidFill>
                 <a:latin typeface="Montserrat"/>
               </a:rPr>
-              <a:t>Veintiséis años de historia natural</a:t>
+              <a:t>Varón de 52 años con síndrome urémico</a:t>
             </a:r>
           </a:p>
         </p:txBody>
@@ -4809,62 +4809,18 @@
       </p:sp>
       <p:sp>
         <p:nvSpPr>
-          <p:cNvPr id="8" name="Rectangle 7"/>
+          <p:cNvPr id="8" name="Rounded Rectangle 7"/>
           <p:cNvSpPr/>
           <p:nvPr/>
         </p:nvSpPr>
         <p:spPr>
           <a:xfrm>
-            <a:off x="914400" y="3657600"/>
-            <a:ext cx="10378440" cy="32004"/>
-          </a:xfrm>
-          <a:prstGeom prst="rect">
-            <a:avLst/>
-          </a:prstGeom>
-          <a:solidFill>
-            <a:srgbClr val="D92A2B"/>
-          </a:solidFill>
-          <a:ln>
-            <a:noFill/>
-          </a:ln>
-          <a:effectLst/>
-        </p:spPr>
-        <p:style>
-          <a:lnRef idx="1">
-            <a:schemeClr val="accent1"/>
-          </a:lnRef>
-          <a:fillRef idx="3">
-            <a:schemeClr val="accent1"/>
-          </a:fillRef>
-          <a:effectRef idx="2">
-            <a:schemeClr val="accent1"/>
-          </a:effectRef>
-          <a:fontRef idx="minor">
-            <a:schemeClr val="lt1"/>
-          </a:fontRef>
-        </p:style>
-        <p:txBody>
-          <a:bodyPr rtlCol="0" anchor="ctr"/>
-          <a:lstStyle/>
-          <a:p>
-            <a:pPr algn="ctr"/>
-          </a:p>
-        </p:txBody>
-      </p:sp>
-      <p:sp>
-        <p:nvSpPr>
-          <p:cNvPr id="9" name="Rounded Rectangle 8"/>
-          <p:cNvSpPr/>
-          <p:nvPr/>
-        </p:nvSpPr>
-        <p:spPr>
-          <a:xfrm>
-            <a:off x="2561844" y="3589020"/>
-            <a:ext cx="164592" cy="164592"/>
+            <a:off x="594360" y="1417320"/>
+            <a:ext cx="5349240" cy="1965960"/>
           </a:xfrm>
           <a:prstGeom prst="roundRect">
             <a:avLst>
-              <a:gd name="adj" fmla="val 50000"/>
+              <a:gd name="adj" fmla="val 4000"/>
             </a:avLst>
           </a:prstGeom>
           <a:solidFill>
@@ -4899,102 +4855,98 @@
       </p:sp>
       <p:sp>
         <p:nvSpPr>
-          <p:cNvPr id="10" name="Oval 9"/>
+          <p:cNvPr id="9" name="TextBox 8"/>
+          <p:cNvSpPr txBox="1"/>
+          <p:nvPr/>
+        </p:nvSpPr>
+        <p:spPr>
+          <a:xfrm>
+            <a:off x="777240" y="1554480"/>
+            <a:ext cx="4983479" cy="228600"/>
+          </a:xfrm>
+          <a:prstGeom prst="rect">
+            <a:avLst/>
+          </a:prstGeom>
+          <a:noFill/>
+        </p:spPr>
+        <p:txBody>
+          <a:bodyPr wrap="square" anchor="t" lIns="0" rIns="0" tIns="0" bIns="0">
+            <a:spAutoFit/>
+          </a:bodyPr>
+          <a:lstStyle/>
+          <a:p>
+            <a:pPr algn="l">
+              <a:lnSpc>
+                <a:spcPct val="108000"/>
+              </a:lnSpc>
+              <a:spcAft>
+                <a:spcPts val="300"/>
+              </a:spcAft>
+            </a:pPr>
+            <a:r>
+              <a:rPr sz="950" b="1" i="0">
+                <a:solidFill>
+                  <a:srgbClr val="FFFFFF"/>
+                </a:solidFill>
+                <a:latin typeface="Montserrat"/>
+              </a:rPr>
+              <a:t>VIÑETA CLÍNICA</a:t>
+            </a:r>
+          </a:p>
+        </p:txBody>
+      </p:sp>
+      <p:sp>
+        <p:nvSpPr>
+          <p:cNvPr id="10" name="TextBox 9"/>
+          <p:cNvSpPr txBox="1"/>
+          <p:nvPr/>
+        </p:nvSpPr>
+        <p:spPr>
+          <a:xfrm>
+            <a:off x="777240" y="1810512"/>
+            <a:ext cx="4983479" cy="1463040"/>
+          </a:xfrm>
+          <a:prstGeom prst="rect">
+            <a:avLst/>
+          </a:prstGeom>
+          <a:noFill/>
+        </p:spPr>
+        <p:txBody>
+          <a:bodyPr wrap="square" anchor="t" lIns="0" rIns="0" tIns="0" bIns="0">
+            <a:spAutoFit/>
+          </a:bodyPr>
+          <a:lstStyle/>
+          <a:p>
+            <a:pPr algn="l">
+              <a:lnSpc>
+                <a:spcPct val="110000"/>
+              </a:lnSpc>
+              <a:spcAft>
+                <a:spcPts val="300"/>
+              </a:spcAft>
+            </a:pPr>
+            <a:r>
+              <a:rPr sz="1150" b="0" i="0">
+                <a:solidFill>
+                  <a:srgbClr val="FFFFFF"/>
+                </a:solidFill>
+                <a:latin typeface="Montserrat"/>
+              </a:rPr>
+              <a:t>Varón de 52 años, albañil, con cefalea persistente, fatiga incapacitante y edema progresivo en miembros inferiores. Ocho meses de astenia, náuseas matutinas, nicturia (3-4 por noche) y edema maleolar bilateral con prurito.</a:t>
+            </a:r>
+          </a:p>
+        </p:txBody>
+      </p:sp>
+      <p:sp>
+        <p:nvSpPr>
+          <p:cNvPr id="11" name="Rounded Rectangle 10"/>
           <p:cNvSpPr/>
           <p:nvPr/>
         </p:nvSpPr>
         <p:spPr>
           <a:xfrm>
-            <a:off x="2525268" y="3534156"/>
-            <a:ext cx="237744" cy="237744"/>
-          </a:xfrm>
-          <a:prstGeom prst="ellipse">
-            <a:avLst/>
-          </a:prstGeom>
-          <a:noFill/>
-          <a:ln w="19050">
-            <a:solidFill>
-              <a:srgbClr val="D92A2B"/>
-            </a:solidFill>
-          </a:ln>
-          <a:effectLst/>
-        </p:spPr>
-        <p:style>
-          <a:lnRef idx="1">
-            <a:schemeClr val="accent1"/>
-          </a:lnRef>
-          <a:fillRef idx="3">
-            <a:schemeClr val="accent1"/>
-          </a:fillRef>
-          <a:effectRef idx="2">
-            <a:schemeClr val="accent1"/>
-          </a:effectRef>
-          <a:fontRef idx="minor">
-            <a:schemeClr val="lt1"/>
-          </a:fontRef>
-        </p:style>
-        <p:txBody>
-          <a:bodyPr rtlCol="0" anchor="ctr"/>
-          <a:lstStyle/>
-          <a:p>
-            <a:pPr algn="ctr"/>
-          </a:p>
-        </p:txBody>
-      </p:sp>
-      <p:sp>
-        <p:nvSpPr>
-          <p:cNvPr id="11" name="Rectangle 10"/>
-          <p:cNvSpPr/>
-          <p:nvPr/>
-        </p:nvSpPr>
-        <p:spPr>
-          <a:xfrm>
-            <a:off x="2634996" y="3429000"/>
-            <a:ext cx="18288" cy="146304"/>
-          </a:xfrm>
-          <a:prstGeom prst="rect">
-            <a:avLst/>
-          </a:prstGeom>
-          <a:solidFill>
-            <a:srgbClr val="D9DDF2"/>
-          </a:solidFill>
-          <a:ln>
-            <a:noFill/>
-          </a:ln>
-          <a:effectLst/>
-        </p:spPr>
-        <p:style>
-          <a:lnRef idx="1">
-            <a:schemeClr val="accent1"/>
-          </a:lnRef>
-          <a:fillRef idx="3">
-            <a:schemeClr val="accent1"/>
-          </a:fillRef>
-          <a:effectRef idx="2">
-            <a:schemeClr val="accent1"/>
-          </a:effectRef>
-          <a:fontRef idx="minor">
-            <a:schemeClr val="lt1"/>
-          </a:fontRef>
-        </p:style>
-        <p:txBody>
-          <a:bodyPr rtlCol="0" anchor="ctr"/>
-          <a:lstStyle/>
-          <a:p>
-            <a:pPr algn="ctr"/>
-          </a:p>
-        </p:txBody>
-      </p:sp>
-      <p:sp>
-        <p:nvSpPr>
-          <p:cNvPr id="12" name="Rounded Rectangle 11"/>
-          <p:cNvSpPr/>
-          <p:nvPr/>
-        </p:nvSpPr>
-        <p:spPr>
-          <a:xfrm>
-            <a:off x="1455420" y="1687067"/>
-            <a:ext cx="2377440" cy="1741932"/>
+            <a:off x="594360" y="3520440"/>
+            <a:ext cx="5349240" cy="2423160"/>
           </a:xfrm>
           <a:prstGeom prst="roundRect">
             <a:avLst>
@@ -5035,23 +4987,138 @@
       </p:sp>
       <p:sp>
         <p:nvSpPr>
-          <p:cNvPr id="13" name="Rectangle 12"/>
+          <p:cNvPr id="12" name="TextBox 11"/>
+          <p:cNvSpPr txBox="1"/>
+          <p:nvPr/>
+        </p:nvSpPr>
+        <p:spPr>
+          <a:xfrm>
+            <a:off x="777240" y="3657600"/>
+            <a:ext cx="4983479" cy="2194560"/>
+          </a:xfrm>
+          <a:prstGeom prst="rect">
+            <a:avLst/>
+          </a:prstGeom>
+          <a:noFill/>
+        </p:spPr>
+        <p:txBody>
+          <a:bodyPr wrap="square" anchor="t" lIns="0" rIns="0" tIns="0" bIns="0">
+            <a:spAutoFit/>
+          </a:bodyPr>
+          <a:lstStyle/>
+          <a:p>
+            <a:pPr algn="l">
+              <a:lnSpc>
+                <a:spcPct val="108000"/>
+              </a:lnSpc>
+              <a:spcBef>
+                <a:spcPts val="0"/>
+              </a:spcBef>
+              <a:spcAft>
+                <a:spcPts val="500"/>
+              </a:spcAft>
+            </a:pPr>
+            <a:r>
+              <a:rPr sz="1000" b="1" i="0">
+                <a:solidFill>
+                  <a:srgbClr val="CA2728"/>
+                </a:solidFill>
+                <a:latin typeface="Montserrat"/>
+              </a:rPr>
+              <a:t>HALLAZGOS CLÍNICOS &amp; PRUEBAS</a:t>
+            </a:r>
+          </a:p>
+          <a:p>
+            <a:pPr algn="l">
+              <a:lnSpc>
+                <a:spcPct val="105000"/>
+              </a:lnSpc>
+              <a:spcBef>
+                <a:spcPts val="0"/>
+              </a:spcBef>
+              <a:spcAft>
+                <a:spcPts val="300"/>
+              </a:spcAft>
+            </a:pPr>
+            <a:r>
+              <a:rPr sz="1100" b="0" i="0">
+                <a:solidFill>
+                  <a:srgbClr val="2B2C4A"/>
+                </a:solidFill>
+                <a:latin typeface="Montserrat"/>
+              </a:rPr>
+              <a:t>• Hematuria macroscópica post-faringitis a los 26 años, sin estudio</a:t>
+            </a:r>
+          </a:p>
+          <a:p>
+            <a:pPr algn="l">
+              <a:lnSpc>
+                <a:spcPct val="105000"/>
+              </a:lnSpc>
+              <a:spcBef>
+                <a:spcPts val="0"/>
+              </a:spcBef>
+              <a:spcAft>
+                <a:spcPts val="300"/>
+              </a:spcAft>
+            </a:pPr>
+            <a:r>
+              <a:rPr sz="1100" b="0" i="0">
+                <a:solidFill>
+                  <a:srgbClr val="2B2C4A"/>
+                </a:solidFill>
+                <a:latin typeface="Montserrat"/>
+              </a:rPr>
+              <a:t>• HTA desde los 47 años; la sobrecarga presora aceleró el colapso hemodinámico.</a:t>
+            </a:r>
+          </a:p>
+          <a:p>
+            <a:pPr algn="l">
+              <a:lnSpc>
+                <a:spcPct val="105000"/>
+              </a:lnSpc>
+              <a:spcBef>
+                <a:spcPts val="0"/>
+              </a:spcBef>
+              <a:spcAft>
+                <a:spcPts val="300"/>
+              </a:spcAft>
+            </a:pPr>
+            <a:r>
+              <a:rPr sz="1100" b="0" i="0">
+                <a:solidFill>
+                  <a:srgbClr val="2B2C4A"/>
+                </a:solidFill>
+                <a:latin typeface="Montserrat"/>
+              </a:rPr>
+              <a:t>• No fumador ni antecedentes quirúrgicos previos</a:t>
+            </a:r>
+          </a:p>
+        </p:txBody>
+      </p:sp>
+      <p:sp>
+        <p:nvSpPr>
+          <p:cNvPr id="13" name="Rounded Rectangle 12"/>
           <p:cNvSpPr/>
           <p:nvPr/>
         </p:nvSpPr>
         <p:spPr>
           <a:xfrm>
-            <a:off x="1455420" y="1687067"/>
-            <a:ext cx="2377440" cy="45720"/>
-          </a:xfrm>
-          <a:prstGeom prst="rect">
-            <a:avLst/>
+            <a:off x="6172200" y="1417320"/>
+            <a:ext cx="5394960" cy="1965960"/>
+          </a:xfrm>
+          <a:prstGeom prst="roundRect">
+            <a:avLst>
+              <a:gd name="adj" fmla="val 4000"/>
+            </a:avLst>
           </a:prstGeom>
           <a:solidFill>
-            <a:srgbClr val="D92A2B"/>
+            <a:srgbClr val="FFFFFF"/>
           </a:solidFill>
-          <a:ln>
-            <a:noFill/>
+          <a:ln w="7620">
+            <a:solidFill>
+              <a:srgbClr val="D9DDF2"/>
+            </a:solidFill>
           </a:ln>
           <a:effectLst/>
         </p:spPr>
@@ -5085,8 +5152,8 @@
         </p:nvSpPr>
         <p:spPr>
           <a:xfrm>
-            <a:off x="1592579" y="1824227"/>
-            <a:ext cx="2103120" cy="1467612"/>
+            <a:off x="6400800" y="1554480"/>
+            <a:ext cx="4937760" cy="1737360"/>
           </a:xfrm>
           <a:prstGeom prst="rect">
             <a:avLst/>
@@ -5095,6 +5162,121 @@
         </p:spPr>
         <p:txBody>
           <a:bodyPr wrap="square" anchor="t" lIns="0" rIns="0" tIns="0" bIns="0">
+            <a:spAutoFit/>
+          </a:bodyPr>
+          <a:lstStyle/>
+          <a:p>
+            <a:pPr algn="l">
+              <a:lnSpc>
+                <a:spcPct val="108000"/>
+              </a:lnSpc>
+              <a:spcBef>
+                <a:spcPts val="0"/>
+              </a:spcBef>
+              <a:spcAft>
+                <a:spcPts val="400"/>
+              </a:spcAft>
+            </a:pPr>
+            <a:r>
+              <a:rPr sz="1000" b="1" i="0">
+                <a:solidFill>
+                  <a:srgbClr val="CA2728"/>
+                </a:solidFill>
+                <a:latin typeface="Montserrat"/>
+              </a:rPr>
+              <a:t>JUICIO DIAGNÓSTICO &amp; RAZONAMIENTO</a:t>
+            </a:r>
+          </a:p>
+          <a:p>
+            <a:pPr algn="l">
+              <a:lnSpc>
+                <a:spcPct val="110000"/>
+              </a:lnSpc>
+              <a:spcBef>
+                <a:spcPts val="0"/>
+              </a:spcBef>
+              <a:spcAft>
+                <a:spcPts val="300"/>
+              </a:spcAft>
+            </a:pPr>
+            <a:r>
+              <a:rPr sz="1080" b="0" i="0">
+                <a:solidFill>
+                  <a:srgbClr val="2B2C4A"/>
+                </a:solidFill>
+                <a:latin typeface="Montserrat"/>
+              </a:rPr>
+              <a:t>El dato pivote es la hematuria juvenil post-faringitis, nunca biopsiada ni tratada: una glomerulopatía primaria no estudiada. La hipertensión secundaria aceleró el deterioro hasta la consulta en fase de falla orgánica descompensada.</a:t>
+            </a:r>
+          </a:p>
+        </p:txBody>
+      </p:sp>
+      <p:sp>
+        <p:nvSpPr>
+          <p:cNvPr id="15" name="Rounded Rectangle 14"/>
+          <p:cNvSpPr/>
+          <p:nvPr/>
+        </p:nvSpPr>
+        <p:spPr>
+          <a:xfrm>
+            <a:off x="6172200" y="3520440"/>
+            <a:ext cx="5394960" cy="1051560"/>
+          </a:xfrm>
+          <a:prstGeom prst="roundRect">
+            <a:avLst>
+              <a:gd name="adj" fmla="val 4000"/>
+            </a:avLst>
+          </a:prstGeom>
+          <a:solidFill>
+            <a:srgbClr val="EEF0FF"/>
+          </a:solidFill>
+          <a:ln w="11430">
+            <a:solidFill>
+              <a:srgbClr val="D92A2B"/>
+            </a:solidFill>
+          </a:ln>
+          <a:effectLst/>
+        </p:spPr>
+        <p:style>
+          <a:lnRef idx="1">
+            <a:schemeClr val="accent1"/>
+          </a:lnRef>
+          <a:fillRef idx="3">
+            <a:schemeClr val="accent1"/>
+          </a:fillRef>
+          <a:effectRef idx="2">
+            <a:schemeClr val="accent1"/>
+          </a:effectRef>
+          <a:fontRef idx="minor">
+            <a:schemeClr val="lt1"/>
+          </a:fontRef>
+        </p:style>
+        <p:txBody>
+          <a:bodyPr rtlCol="0" anchor="ctr"/>
+          <a:lstStyle/>
+          <a:p>
+            <a:pPr algn="ctr"/>
+          </a:p>
+        </p:txBody>
+      </p:sp>
+      <p:sp>
+        <p:nvSpPr>
+          <p:cNvPr id="16" name="TextBox 15"/>
+          <p:cNvSpPr txBox="1"/>
+          <p:nvPr/>
+        </p:nvSpPr>
+        <p:spPr>
+          <a:xfrm>
+            <a:off x="6400800" y="3611880"/>
+            <a:ext cx="4937760" cy="868680"/>
+          </a:xfrm>
+          <a:prstGeom prst="rect">
+            <a:avLst/>
+          </a:prstGeom>
+          <a:noFill/>
+        </p:spPr>
+        <p:txBody>
+          <a:bodyPr wrap="square" anchor="ctr" lIns="0" rIns="0" tIns="0" bIns="0">
             <a:spAutoFit/>
           </a:bodyPr>
           <a:lstStyle/>
@@ -5113,11 +5295,11 @@
             <a:r>
               <a:rPr sz="950" b="1" i="0">
                 <a:solidFill>
-                  <a:srgbClr val="CA2728"/>
+                  <a:srgbClr val="B91C1C"/>
                 </a:solidFill>
                 <a:latin typeface="Montserrat"/>
               </a:rPr>
-              <a:t>26 años</a:t>
+              <a:t>DIAGNÓSTICO DEFINITIVO</a:t>
             </a:r>
           </a:p>
           <a:p>
@@ -5133,57 +5315,35 @@
               </a:spcAft>
             </a:pPr>
             <a:r>
-              <a:rPr sz="1200" b="1" i="0">
+              <a:rPr sz="1250" b="1" i="0">
                 <a:solidFill>
                   <a:srgbClr val="3854CC"/>
                 </a:solidFill>
                 <a:latin typeface="Montserrat"/>
               </a:rPr>
-              <a:t>Brote nefrítico inicial</a:t>
-            </a:r>
-          </a:p>
-          <a:p>
-            <a:pPr algn="l">
-              <a:lnSpc>
-                <a:spcPct val="105000"/>
-              </a:lnSpc>
-              <a:spcBef>
-                <a:spcPts val="0"/>
-              </a:spcBef>
-              <a:spcAft>
-                <a:spcPts val="300"/>
-              </a:spcAft>
-            </a:pPr>
-            <a:r>
-              <a:rPr sz="1019" b="0" i="0">
-                <a:solidFill>
-                  <a:srgbClr val="2B2C4A"/>
-                </a:solidFill>
-                <a:latin typeface="Montserrat"/>
-              </a:rPr>
-              <a:t>Hematuria macroscópica post-faringitis repetida; nunca biopsiada ni tratada.</a:t>
-            </a:r>
-          </a:p>
-        </p:txBody>
-      </p:sp>
-      <p:sp>
-        <p:nvSpPr>
-          <p:cNvPr id="15" name="Rounded Rectangle 14"/>
+              <a:t>Síndrome urémico en ERC estadio 5</a:t>
+            </a:r>
+          </a:p>
+        </p:txBody>
+      </p:sp>
+      <p:sp>
+        <p:nvSpPr>
+          <p:cNvPr id="17" name="Rounded Rectangle 16"/>
           <p:cNvSpPr/>
           <p:nvPr/>
         </p:nvSpPr>
         <p:spPr>
           <a:xfrm>
-            <a:off x="6021324" y="3589020"/>
-            <a:ext cx="164592" cy="164592"/>
+            <a:off x="6172200" y="4709160"/>
+            <a:ext cx="5394960" cy="1234440"/>
           </a:xfrm>
           <a:prstGeom prst="roundRect">
             <a:avLst>
-              <a:gd name="adj" fmla="val 50000"/>
+              <a:gd name="adj" fmla="val 4000"/>
             </a:avLst>
           </a:prstGeom>
           <a:solidFill>
-            <a:srgbClr val="3854CC"/>
+            <a:srgbClr val="D92A2B"/>
           </a:solidFill>
           <a:ln>
             <a:noFill/>
@@ -5214,150 +5374,14 @@
       </p:sp>
       <p:sp>
         <p:nvSpPr>
-          <p:cNvPr id="16" name="Rectangle 15"/>
-          <p:cNvSpPr/>
-          <p:nvPr/>
-        </p:nvSpPr>
-        <p:spPr>
-          <a:xfrm>
-            <a:off x="6094476" y="3758184"/>
-            <a:ext cx="18288" cy="128015"/>
-          </a:xfrm>
-          <a:prstGeom prst="rect">
-            <a:avLst/>
-          </a:prstGeom>
-          <a:solidFill>
-            <a:srgbClr val="D9DDF2"/>
-          </a:solidFill>
-          <a:ln>
-            <a:noFill/>
-          </a:ln>
-          <a:effectLst/>
-        </p:spPr>
-        <p:style>
-          <a:lnRef idx="1">
-            <a:schemeClr val="accent1"/>
-          </a:lnRef>
-          <a:fillRef idx="3">
-            <a:schemeClr val="accent1"/>
-          </a:fillRef>
-          <a:effectRef idx="2">
-            <a:schemeClr val="accent1"/>
-          </a:effectRef>
-          <a:fontRef idx="minor">
-            <a:schemeClr val="lt1"/>
-          </a:fontRef>
-        </p:style>
-        <p:txBody>
-          <a:bodyPr rtlCol="0" anchor="ctr"/>
-          <a:lstStyle/>
-          <a:p>
-            <a:pPr algn="ctr"/>
-          </a:p>
-        </p:txBody>
-      </p:sp>
-      <p:sp>
-        <p:nvSpPr>
-          <p:cNvPr id="17" name="Rounded Rectangle 16"/>
-          <p:cNvSpPr/>
-          <p:nvPr/>
-        </p:nvSpPr>
-        <p:spPr>
-          <a:xfrm>
-            <a:off x="4914900" y="3886200"/>
-            <a:ext cx="2377440" cy="1741932"/>
-          </a:xfrm>
-          <a:prstGeom prst="roundRect">
-            <a:avLst>
-              <a:gd name="adj" fmla="val 4000"/>
-            </a:avLst>
-          </a:prstGeom>
-          <a:solidFill>
-            <a:srgbClr val="FFFFFF"/>
-          </a:solidFill>
-          <a:ln w="7620">
-            <a:solidFill>
-              <a:srgbClr val="D9DDF2"/>
-            </a:solidFill>
-          </a:ln>
-          <a:effectLst/>
-        </p:spPr>
-        <p:style>
-          <a:lnRef idx="1">
-            <a:schemeClr val="accent1"/>
-          </a:lnRef>
-          <a:fillRef idx="3">
-            <a:schemeClr val="accent1"/>
-          </a:fillRef>
-          <a:effectRef idx="2">
-            <a:schemeClr val="accent1"/>
-          </a:effectRef>
-          <a:fontRef idx="minor">
-            <a:schemeClr val="lt1"/>
-          </a:fontRef>
-        </p:style>
-        <p:txBody>
-          <a:bodyPr rtlCol="0" anchor="ctr"/>
-          <a:lstStyle/>
-          <a:p>
-            <a:pPr algn="ctr"/>
-          </a:p>
-        </p:txBody>
-      </p:sp>
-      <p:sp>
-        <p:nvSpPr>
-          <p:cNvPr id="18" name="Rectangle 17"/>
-          <p:cNvSpPr/>
-          <p:nvPr/>
-        </p:nvSpPr>
-        <p:spPr>
-          <a:xfrm>
-            <a:off x="4914900" y="3886200"/>
-            <a:ext cx="2377440" cy="45720"/>
-          </a:xfrm>
-          <a:prstGeom prst="rect">
-            <a:avLst/>
-          </a:prstGeom>
-          <a:solidFill>
-            <a:srgbClr val="3854CC"/>
-          </a:solidFill>
-          <a:ln>
-            <a:noFill/>
-          </a:ln>
-          <a:effectLst/>
-        </p:spPr>
-        <p:style>
-          <a:lnRef idx="1">
-            <a:schemeClr val="accent1"/>
-          </a:lnRef>
-          <a:fillRef idx="3">
-            <a:schemeClr val="accent1"/>
-          </a:fillRef>
-          <a:effectRef idx="2">
-            <a:schemeClr val="accent1"/>
-          </a:effectRef>
-          <a:fontRef idx="minor">
-            <a:schemeClr val="lt1"/>
-          </a:fontRef>
-        </p:style>
-        <p:txBody>
-          <a:bodyPr rtlCol="0" anchor="ctr"/>
-          <a:lstStyle/>
-          <a:p>
-            <a:pPr algn="ctr"/>
-          </a:p>
-        </p:txBody>
-      </p:sp>
-      <p:sp>
-        <p:nvSpPr>
-          <p:cNvPr id="19" name="TextBox 18"/>
+          <p:cNvPr id="18" name="TextBox 17"/>
           <p:cNvSpPr txBox="1"/>
           <p:nvPr/>
         </p:nvSpPr>
         <p:spPr>
           <a:xfrm>
-            <a:off x="5052060" y="4023360"/>
-            <a:ext cx="2103120" cy="1467612"/>
+            <a:off x="6400800" y="4800600"/>
+            <a:ext cx="4937760" cy="1051560"/>
           </a:xfrm>
           <a:prstGeom prst="rect">
             <a:avLst/>
@@ -5365,7 +5389,7 @@
           <a:noFill/>
         </p:spPr>
         <p:txBody>
-          <a:bodyPr wrap="square" anchor="t" lIns="0" rIns="0" tIns="0" bIns="0">
+          <a:bodyPr wrap="square" anchor="ctr" lIns="0" rIns="0" tIns="0" bIns="0">
             <a:spAutoFit/>
           </a:bodyPr>
           <a:lstStyle/>
@@ -5384,11 +5408,11 @@
             <a:r>
               <a:rPr sz="950" b="1" i="0">
                 <a:solidFill>
-                  <a:srgbClr val="CA2728"/>
+                  <a:srgbClr val="FFFFFF"/>
                 </a:solidFill>
                 <a:latin typeface="Montserrat"/>
               </a:rPr>
-              <a:t>47 años</a:t>
+              <a:t>PERLA CLÍNICA</a:t>
             </a:r>
           </a:p>
           <a:p>
@@ -5404,313 +5428,20 @@
               </a:spcAft>
             </a:pPr>
             <a:r>
-              <a:rPr sz="1200" b="1" i="0">
-                <a:solidFill>
-                  <a:srgbClr val="3854CC"/>
+              <a:rPr sz="1080" b="0" i="0">
+                <a:solidFill>
+                  <a:srgbClr val="FFFFFF"/>
                 </a:solidFill>
                 <a:latin typeface="Montserrat"/>
               </a:rPr>
-              <a:t>Hipertensión arterial</a:t>
-            </a:r>
-          </a:p>
-          <a:p>
-            <a:pPr algn="l">
-              <a:lnSpc>
-                <a:spcPct val="105000"/>
-              </a:lnSpc>
-              <a:spcBef>
-                <a:spcPts val="0"/>
-              </a:spcBef>
-              <a:spcAft>
-                <a:spcPts val="300"/>
-              </a:spcAft>
-            </a:pPr>
-            <a:r>
-              <a:rPr sz="1019" b="0" i="0">
-                <a:solidFill>
-                  <a:srgbClr val="2B2C4A"/>
-                </a:solidFill>
-                <a:latin typeface="Montserrat"/>
-              </a:rPr>
-              <a:t>Pauta irregular desde hace 5 años; la sobrecarga presora aceleró el colapso hemodinámico de las nefronas.</a:t>
-            </a:r>
-          </a:p>
-        </p:txBody>
-      </p:sp>
-      <p:sp>
-        <p:nvSpPr>
-          <p:cNvPr id="20" name="Rounded Rectangle 19"/>
-          <p:cNvSpPr/>
-          <p:nvPr/>
-        </p:nvSpPr>
-        <p:spPr>
-          <a:xfrm>
-            <a:off x="9480803" y="3589020"/>
-            <a:ext cx="164592" cy="164592"/>
-          </a:xfrm>
-          <a:prstGeom prst="roundRect">
-            <a:avLst>
-              <a:gd name="adj" fmla="val 50000"/>
-            </a:avLst>
-          </a:prstGeom>
-          <a:solidFill>
-            <a:srgbClr val="3854CC"/>
-          </a:solidFill>
-          <a:ln>
-            <a:noFill/>
-          </a:ln>
-          <a:effectLst/>
-        </p:spPr>
-        <p:style>
-          <a:lnRef idx="1">
-            <a:schemeClr val="accent1"/>
-          </a:lnRef>
-          <a:fillRef idx="3">
-            <a:schemeClr val="accent1"/>
-          </a:fillRef>
-          <a:effectRef idx="2">
-            <a:schemeClr val="accent1"/>
-          </a:effectRef>
-          <a:fontRef idx="minor">
-            <a:schemeClr val="lt1"/>
-          </a:fontRef>
-        </p:style>
-        <p:txBody>
-          <a:bodyPr rtlCol="0" anchor="ctr"/>
-          <a:lstStyle/>
-          <a:p>
-            <a:pPr algn="ctr"/>
-          </a:p>
-        </p:txBody>
-      </p:sp>
-      <p:sp>
-        <p:nvSpPr>
-          <p:cNvPr id="21" name="Rectangle 20"/>
-          <p:cNvSpPr/>
-          <p:nvPr/>
-        </p:nvSpPr>
-        <p:spPr>
-          <a:xfrm>
-            <a:off x="9553956" y="3429000"/>
-            <a:ext cx="18288" cy="146304"/>
-          </a:xfrm>
-          <a:prstGeom prst="rect">
-            <a:avLst/>
-          </a:prstGeom>
-          <a:solidFill>
-            <a:srgbClr val="D9DDF2"/>
-          </a:solidFill>
-          <a:ln>
-            <a:noFill/>
-          </a:ln>
-          <a:effectLst/>
-        </p:spPr>
-        <p:style>
-          <a:lnRef idx="1">
-            <a:schemeClr val="accent1"/>
-          </a:lnRef>
-          <a:fillRef idx="3">
-            <a:schemeClr val="accent1"/>
-          </a:fillRef>
-          <a:effectRef idx="2">
-            <a:schemeClr val="accent1"/>
-          </a:effectRef>
-          <a:fontRef idx="minor">
-            <a:schemeClr val="lt1"/>
-          </a:fontRef>
-        </p:style>
-        <p:txBody>
-          <a:bodyPr rtlCol="0" anchor="ctr"/>
-          <a:lstStyle/>
-          <a:p>
-            <a:pPr algn="ctr"/>
-          </a:p>
-        </p:txBody>
-      </p:sp>
-      <p:sp>
-        <p:nvSpPr>
-          <p:cNvPr id="22" name="Rounded Rectangle 21"/>
-          <p:cNvSpPr/>
-          <p:nvPr/>
-        </p:nvSpPr>
-        <p:spPr>
-          <a:xfrm>
-            <a:off x="8374379" y="1687067"/>
-            <a:ext cx="2377440" cy="1741932"/>
-          </a:xfrm>
-          <a:prstGeom prst="roundRect">
-            <a:avLst>
-              <a:gd name="adj" fmla="val 4000"/>
-            </a:avLst>
-          </a:prstGeom>
-          <a:solidFill>
-            <a:srgbClr val="FFFFFF"/>
-          </a:solidFill>
-          <a:ln w="7620">
-            <a:solidFill>
-              <a:srgbClr val="D9DDF2"/>
-            </a:solidFill>
-          </a:ln>
-          <a:effectLst/>
-        </p:spPr>
-        <p:style>
-          <a:lnRef idx="1">
-            <a:schemeClr val="accent1"/>
-          </a:lnRef>
-          <a:fillRef idx="3">
-            <a:schemeClr val="accent1"/>
-          </a:fillRef>
-          <a:effectRef idx="2">
-            <a:schemeClr val="accent1"/>
-          </a:effectRef>
-          <a:fontRef idx="minor">
-            <a:schemeClr val="lt1"/>
-          </a:fontRef>
-        </p:style>
-        <p:txBody>
-          <a:bodyPr rtlCol="0" anchor="ctr"/>
-          <a:lstStyle/>
-          <a:p>
-            <a:pPr algn="ctr"/>
-          </a:p>
-        </p:txBody>
-      </p:sp>
-      <p:sp>
-        <p:nvSpPr>
-          <p:cNvPr id="23" name="Rectangle 22"/>
-          <p:cNvSpPr/>
-          <p:nvPr/>
-        </p:nvSpPr>
-        <p:spPr>
-          <a:xfrm>
-            <a:off x="8374379" y="1687067"/>
-            <a:ext cx="2377440" cy="45720"/>
-          </a:xfrm>
-          <a:prstGeom prst="rect">
-            <a:avLst/>
-          </a:prstGeom>
-          <a:solidFill>
-            <a:srgbClr val="D92A2B"/>
-          </a:solidFill>
-          <a:ln>
-            <a:noFill/>
-          </a:ln>
-          <a:effectLst/>
-        </p:spPr>
-        <p:style>
-          <a:lnRef idx="1">
-            <a:schemeClr val="accent1"/>
-          </a:lnRef>
-          <a:fillRef idx="3">
-            <a:schemeClr val="accent1"/>
-          </a:fillRef>
-          <a:effectRef idx="2">
-            <a:schemeClr val="accent1"/>
-          </a:effectRef>
-          <a:fontRef idx="minor">
-            <a:schemeClr val="lt1"/>
-          </a:fontRef>
-        </p:style>
-        <p:txBody>
-          <a:bodyPr rtlCol="0" anchor="ctr"/>
-          <a:lstStyle/>
-          <a:p>
-            <a:pPr algn="ctr"/>
-          </a:p>
-        </p:txBody>
-      </p:sp>
-      <p:sp>
-        <p:nvSpPr>
-          <p:cNvPr id="24" name="TextBox 23"/>
-          <p:cNvSpPr txBox="1"/>
-          <p:nvPr/>
-        </p:nvSpPr>
-        <p:spPr>
-          <a:xfrm>
-            <a:off x="8511539" y="1824227"/>
-            <a:ext cx="2103120" cy="1467612"/>
-          </a:xfrm>
-          <a:prstGeom prst="rect">
-            <a:avLst/>
-          </a:prstGeom>
-          <a:noFill/>
-        </p:spPr>
-        <p:txBody>
-          <a:bodyPr wrap="square" anchor="t" lIns="0" rIns="0" tIns="0" bIns="0">
-            <a:spAutoFit/>
-          </a:bodyPr>
-          <a:lstStyle/>
-          <a:p>
-            <a:pPr algn="l">
-              <a:lnSpc>
-                <a:spcPct val="108000"/>
-              </a:lnSpc>
-              <a:spcBef>
-                <a:spcPts val="0"/>
-              </a:spcBef>
-              <a:spcAft>
-                <a:spcPts val="200"/>
-              </a:spcAft>
-            </a:pPr>
-            <a:r>
-              <a:rPr sz="950" b="1" i="0">
-                <a:solidFill>
-                  <a:srgbClr val="CA2728"/>
-                </a:solidFill>
-                <a:latin typeface="Montserrat"/>
-              </a:rPr>
-              <a:t>52 años (actual)</a:t>
-            </a:r>
-          </a:p>
-          <a:p>
-            <a:pPr algn="l">
-              <a:lnSpc>
-                <a:spcPct val="108000"/>
-              </a:lnSpc>
-              <a:spcBef>
-                <a:spcPts val="0"/>
-              </a:spcBef>
-              <a:spcAft>
-                <a:spcPts val="300"/>
-              </a:spcAft>
-            </a:pPr>
-            <a:r>
-              <a:rPr sz="1200" b="1" i="0">
-                <a:solidFill>
-                  <a:srgbClr val="3854CC"/>
-                </a:solidFill>
-                <a:latin typeface="Montserrat"/>
-              </a:rPr>
-              <a:t>Síndrome urémico</a:t>
-            </a:r>
-          </a:p>
-          <a:p>
-            <a:pPr algn="l">
-              <a:lnSpc>
-                <a:spcPct val="105000"/>
-              </a:lnSpc>
-              <a:spcBef>
-                <a:spcPts val="0"/>
-              </a:spcBef>
-              <a:spcAft>
-                <a:spcPts val="300"/>
-              </a:spcAft>
-            </a:pPr>
-            <a:r>
-              <a:rPr sz="1019" b="0" i="0">
-                <a:solidFill>
-                  <a:srgbClr val="2B2C4A"/>
-                </a:solidFill>
-                <a:latin typeface="Montserrat"/>
-              </a:rPr>
-              <a:t>Astenia, náuseas matutinas, prurito, nicturia y edemas en miembros inferiores.</a:t>
-            </a:r>
-          </a:p>
-        </p:txBody>
-      </p:sp>
-      <p:sp>
-        <p:nvSpPr>
-          <p:cNvPr id="25" name="TextBox 24"/>
+              <a:t>La hematuria post-faringitis recurrente amerita biopsia renal: el diagnóstico precoz habría evitado la fibrosis irreversible.</a:t>
+            </a:r>
+          </a:p>
+        </p:txBody>
+      </p:sp>
+      <p:sp>
+        <p:nvSpPr>
+          <p:cNvPr id="19" name="TextBox 18"/>
           <p:cNvSpPr txBox="1"/>
           <p:nvPr/>
         </p:nvSpPr>
@@ -5745,7 +5476,7 @@
                 </a:solidFill>
                 <a:latin typeface="Montserrat"/>
               </a:rPr>
-              <a:t>Varón de 52 años, albañil, con 8 meses de evolución y pérdida de 4 kg no voluntaria.</a:t>
+              <a:t>Evolución de 8 meses con pérdida de 4 kg y anorexia marcada.</a:t>
             </a:r>
           </a:p>
         </p:txBody>
@@ -7240,8 +6971,8 @@
         </p:nvSpPr>
         <p:spPr>
           <a:xfrm>
-            <a:off x="2062734" y="1380744"/>
-            <a:ext cx="8036051" cy="4416552"/>
+            <a:off x="3220651" y="1380744"/>
+            <a:ext cx="5720217" cy="4416552"/>
           </a:xfrm>
           <a:prstGeom prst="roundRect">
             <a:avLst>
@@ -7282,7 +7013,7 @@
       </p:sp>
       <p:pic>
         <p:nvPicPr>
-          <p:cNvPr id="9" name="Picture 8" descr="macro_rinon_contraido.png"/>
+          <p:cNvPr id="9" name="Picture 8" descr="macro_rinon_contraido_web.jpg"/>
           <p:cNvPicPr>
             <a:picLocks noChangeAspect="1"/>
           </p:cNvPicPr>
@@ -7296,8 +7027,8 @@
         </p:blipFill>
         <p:spPr>
           <a:xfrm>
-            <a:off x="2099310" y="1417320"/>
-            <a:ext cx="7962899" cy="4343400"/>
+            <a:off x="3257227" y="1417320"/>
+            <a:ext cx="5647065" cy="4343400"/>
           </a:xfrm>
           <a:prstGeom prst="rect">
             <a:avLst/>
@@ -7341,7 +7072,7 @@
                 </a:solidFill>
                 <a:latin typeface="Montserrat"/>
               </a:rPr>
-              <a:t>Corte coronal: superficie finamente granular, corteza de 2-3 mm y vasos arcuatos rígidos entreabiertos.</a:t>
+              <a:t>Superficie cortical finamente granular con regla métrica: la morfología macro del riñón contraído terminal.</a:t>
             </a:r>
           </a:p>
         </p:txBody>
@@ -7383,7 +7114,7 @@
                 </a:solidFill>
                 <a:latin typeface="Montserrat"/>
               </a:rPr>
-              <a:t>Caso: 7,8 cm y 70 g frente a valores normales (12 cm y 120-150 g) — reducción simétrica que confirma la lesión crónica terminal.  •  Crédito: Ilustración generada para esta presentación (esquema didáctico)</a:t>
+              <a:t>Caso: 7,8 cm y 70 g frente a valores normales (12 cm y 120-150 g) — reducción simétrica que confirma la lesión crónica terminal.  •  Crédito: Wikimedia Commons — Gross pathology of nephrosclerosis (upload.wikimedia.org)</a:t>
             </a:r>
           </a:p>
         </p:txBody>
@@ -7670,8 +7401,8 @@
         </p:nvSpPr>
         <p:spPr>
           <a:xfrm>
-            <a:off x="2062734" y="1380744"/>
-            <a:ext cx="8036051" cy="4416552"/>
+            <a:off x="2045498" y="1380744"/>
+            <a:ext cx="8070523" cy="4416552"/>
           </a:xfrm>
           <a:prstGeom prst="roundRect">
             <a:avLst>
@@ -7712,7 +7443,7 @@
       </p:sp>
       <p:pic>
         <p:nvPicPr>
-          <p:cNvPr id="9" name="Picture 8" descr="micro_panel_triada.png"/>
+          <p:cNvPr id="9" name="Picture 8" descr="micro_rinon_web.jpg"/>
           <p:cNvPicPr>
             <a:picLocks noChangeAspect="1"/>
           </p:cNvPicPr>
@@ -7726,8 +7457,8 @@
         </p:blipFill>
         <p:spPr>
           <a:xfrm>
-            <a:off x="2099310" y="1417320"/>
-            <a:ext cx="7962899" cy="4343400"/>
+            <a:off x="2082074" y="1417320"/>
+            <a:ext cx="7997371" cy="4343400"/>
           </a:xfrm>
           <a:prstGeom prst="rect">
             <a:avLst/>
@@ -7771,7 +7502,7 @@
                 </a:solidFill>
                 <a:latin typeface="Montserrat"/>
               </a:rPr>
-              <a:t>Tríada de la etapa terminal: obsolescencia glomerular, fibrosis intersticial masiva y tiroidización tubular.</a:t>
+              <a:t>Fibrosis intersticial con atrofia tubular y glomérulo con esclerosis global: histología del estadio terminal.</a:t>
             </a:r>
           </a:p>
         </p:txBody>
@@ -7813,7 +7544,7 @@
                 </a:solidFill>
                 <a:latin typeface="Montserrat"/>
               </a:rPr>
-              <a:t>Tinciones H&amp;E, PAS y tricrómico de Masson · &gt; 85% de glomérulos con esclerosis global.  •  Crédito: Ilustración generada para esta presentación (esquema didáctico)</a:t>
+              <a:t>Tinciones H&amp;E, PAS y tricrómico de Masson · &gt; 85% de glomérulos con esclerosis global.  •  Crédito: PathologyOutlines — Interstitial fibrosis and tubular atrophy (pathologyoutlines.com)</a:t>
             </a:r>
           </a:p>
         </p:txBody>

--- a/tema3-glomerulonefritis/tema3_glomerulonefritis_cronica.pptx
+++ b/tema3-glomerulonefritis/tema3_glomerulonefritis_cronica.pptx
@@ -7443,7 +7443,7 @@
       </p:sp>
       <p:pic>
         <p:nvPicPr>
-          <p:cNvPr id="9" name="Picture 8" descr="micro_rinon_web.jpg"/>
+          <p:cNvPr id="9" name="Picture 8" descr="micro_rinon_web_anotada.jpg"/>
           <p:cNvPicPr>
             <a:picLocks noChangeAspect="1"/>
           </p:cNvPicPr>
@@ -7502,7 +7502,7 @@
                 </a:solidFill>
                 <a:latin typeface="Montserrat"/>
               </a:rPr>
-              <a:t>Fibrosis intersticial con atrofia tubular y glomérulo con esclerosis global: histología del estadio terminal.</a:t>
+              <a:t>Micrografía anotada: esclerosis glomerular global, fibrosis intersticial y atrofia tubular.</a:t>
             </a:r>
           </a:p>
         </p:txBody>
@@ -7544,7 +7544,7 @@
                 </a:solidFill>
                 <a:latin typeface="Montserrat"/>
               </a:rPr>
-              <a:t>Tinciones H&amp;E, PAS y tricrómico de Masson · &gt; 85% de glomérulos con esclerosis global.  •  Crédito: PathologyOutlines — Interstitial fibrosis and tubular atrophy (pathologyoutlines.com)</a:t>
+              <a:t>Tinciones H&amp;E, PAS y tricrómico de Masson · &gt; 85% de glomérulos con esclerosis global.  •  Crédito: PathologyOutlines (pathologyoutlines.com) + anotación gráfica del Grupo 3</a:t>
             </a:r>
           </a:p>
         </p:txBody>

--- a/tema3-glomerulonefritis/tema3_glomerulonefritis_cronica.pptx
+++ b/tema3-glomerulonefritis/tema3_glomerulonefritis_cronica.pptx
@@ -7401,8 +7401,8 @@
         </p:nvSpPr>
         <p:spPr>
           <a:xfrm>
-            <a:off x="2045498" y="1380744"/>
-            <a:ext cx="8070523" cy="4416552"/>
+            <a:off x="2088093" y="1380744"/>
+            <a:ext cx="7985332" cy="4416552"/>
           </a:xfrm>
           <a:prstGeom prst="roundRect">
             <a:avLst>
@@ -7443,7 +7443,7 @@
       </p:sp>
       <p:pic>
         <p:nvPicPr>
-          <p:cNvPr id="9" name="Picture 8" descr="micro_rinon_web_anotada.jpg"/>
+          <p:cNvPr id="9" name="Picture 8" descr="micro_rinon_esclerosis_web_anotada.jpg"/>
           <p:cNvPicPr>
             <a:picLocks noChangeAspect="1"/>
           </p:cNvPicPr>
@@ -7457,8 +7457,8 @@
         </p:blipFill>
         <p:spPr>
           <a:xfrm>
-            <a:off x="2082074" y="1417320"/>
-            <a:ext cx="7997371" cy="4343400"/>
+            <a:off x="2124669" y="1417320"/>
+            <a:ext cx="7912180" cy="4343400"/>
           </a:xfrm>
           <a:prstGeom prst="rect">
             <a:avLst/>
@@ -7502,7 +7502,7 @@
                 </a:solidFill>
                 <a:latin typeface="Montserrat"/>
               </a:rPr>
-              <a:t>Micrografía anotada: esclerosis glomerular global, fibrosis intersticial y atrofia tubular.</a:t>
+              <a:t>Micrografía anotada (PAS): glomérulo con esclerosis global, fibrosis intersticial y atrofia tubular.</a:t>
             </a:r>
           </a:p>
         </p:txBody>
@@ -7544,7 +7544,7 @@
                 </a:solidFill>
                 <a:latin typeface="Montserrat"/>
               </a:rPr>
-              <a:t>Tinciones H&amp;E, PAS y tricrómico de Masson · &gt; 85% de glomérulos con esclerosis global.  •  Crédito: PathologyOutlines (pathologyoutlines.com) + anotación gráfica del Grupo 3</a:t>
+              <a:t>Tinción PAS · &gt; 85% de glomérulos con esclerosis global en la biopsia: confirma el estadio terminal.  •  Crédito: PathologyOutlines (pathologyoutlines.com) — Global glomerulosclerosis, PAS + anotación gráfica del Grupo 3</a:t>
             </a:r>
           </a:p>
         </p:txBody>
